--- a/assets/pptx/catalog-42.pptx
+++ b/assets/pptx/catalog-42.pptx
@@ -3262,7 +3262,7 @@
                 <a:ea typeface="Ebrima"/>
                 <a:cs typeface="Ebrima"/>
               </a:rPr>
-              <a:t>አዲስ ነገር የዛች ለት ሆነ (2x) በመንፈሴ ሰላም ሰፈነ (2x) አፈሰሰው በልቤ ደስታ (2x) መንፈስ ቅዱስ የሰላም ጌታ (2x)</a:t>
+              <a:t>አዲስ ነገር የዛች ለት ሆነ 2x በመንፈሴ ሰላም ሰፈነ 2x አፈሰሰው በልቤ ደስታ 2x መንፈስ ቅዱስ የሰላም ጌታ 2x</a:t>
             </a:r>
           </a:p>
         </p:txBody>
